--- a/Slide/2026新歓スライド(きたほしめぐり担当分).pptx
+++ b/Slide/2026新歓スライド(きたほしめぐり担当分).pptx
@@ -5,7 +5,7 @@
     <p:sldMasterId id="2147483726" r:id="rId1"/>
   </p:sldMasterIdLst>
   <p:notesMasterIdLst>
-    <p:notesMasterId r:id="rId9"/>
+    <p:notesMasterId r:id="rId10"/>
   </p:notesMasterIdLst>
   <p:sldIdLst>
     <p:sldId id="287" r:id="rId2"/>
@@ -15,6 +15,7 @@
     <p:sldId id="291" r:id="rId6"/>
     <p:sldId id="292" r:id="rId7"/>
     <p:sldId id="293" r:id="rId8"/>
+    <p:sldId id="294" r:id="rId9"/>
   </p:sldIdLst>
   <p:sldSz cx="12192000" cy="6858000"/>
   <p:notesSz cx="6858000" cy="9144000"/>
@@ -4823,7 +4824,7 @@
             </a:r>
             <a:r>
               <a:rPr lang="ja-JP" altLang="en-US" sz="2400" dirty="0"/>
-              <a:t>未満の時は消灯するようにしてみよう。</a:t>
+              <a:t>未満の時は消灯するようにしてみよう</a:t>
             </a:r>
             <a:endParaRPr lang="en-US" altLang="ja-JP" sz="2400" dirty="0"/>
           </a:p>
@@ -5000,7 +5001,23 @@
             </a:pPr>
             <a:r>
               <a:rPr kumimoji="1" lang="ja-JP" altLang="en-US" sz="2400" dirty="0"/>
-              <a:t>　ボタンの電圧をパソコンで見てみよう</a:t>
+              <a:t>　ボタンの</a:t>
+            </a:r>
+            <a:r>
+              <a:rPr lang="ja-JP" altLang="en-US" sz="2400" dirty="0"/>
+              <a:t>オン</a:t>
+            </a:r>
+            <a:r>
+              <a:rPr lang="en-US" altLang="ja-JP" sz="2400" dirty="0"/>
+              <a:t>/</a:t>
+            </a:r>
+            <a:r>
+              <a:rPr lang="ja-JP" altLang="en-US" sz="2400" dirty="0"/>
+              <a:t>オフ</a:t>
+            </a:r>
+            <a:r>
+              <a:rPr kumimoji="1" lang="ja-JP" altLang="en-US" sz="2400" dirty="0"/>
+              <a:t>をパソコンで見てみよう</a:t>
             </a:r>
             <a:endParaRPr kumimoji="1" lang="en-US" altLang="ja-JP" sz="2400" dirty="0"/>
           </a:p>
@@ -5075,7 +5092,15 @@
             </a:r>
             <a:r>
               <a:rPr kumimoji="1" lang="en-US" altLang="ja-JP" sz="2400" dirty="0"/>
-              <a:t>3</a:t>
+              <a:t>3(</a:t>
+            </a:r>
+            <a:r>
+              <a:rPr kumimoji="1" lang="ja-JP" altLang="en-US" sz="2400" dirty="0"/>
+              <a:t>難しい</a:t>
+            </a:r>
+            <a:r>
+              <a:rPr kumimoji="1" lang="en-US" altLang="ja-JP" sz="2400" dirty="0"/>
+              <a:t>)</a:t>
             </a:r>
           </a:p>
           <a:p>
@@ -5116,6 +5141,191 @@
     <p:extLst>
       <p:ext uri="{BB962C8B-B14F-4D97-AF65-F5344CB8AC3E}">
         <p14:creationId xmlns:p14="http://schemas.microsoft.com/office/powerpoint/2010/main" val="2137727519"/>
+      </p:ext>
+    </p:extLst>
+  </p:cSld>
+  <p:clrMapOvr>
+    <a:masterClrMapping/>
+  </p:clrMapOvr>
+</p:sld>
+</file>
+
+<file path=ppt/slides/slide8.xml><?xml version="1.0" encoding="utf-8"?>
+<p:sld xmlns:a="http://schemas.openxmlformats.org/drawingml/2006/main" xmlns:r="http://schemas.openxmlformats.org/officeDocument/2006/relationships" xmlns:p="http://schemas.openxmlformats.org/presentationml/2006/main">
+  <p:cSld>
+    <p:spTree>
+      <p:nvGrpSpPr>
+        <p:cNvPr id="1" name=""/>
+        <p:cNvGrpSpPr/>
+        <p:nvPr/>
+      </p:nvGrpSpPr>
+      <p:grpSpPr>
+        <a:xfrm>
+          <a:off x="0" y="0"/>
+          <a:ext cx="0" cy="0"/>
+          <a:chOff x="0" y="0"/>
+          <a:chExt cx="0" cy="0"/>
+        </a:xfrm>
+      </p:grpSpPr>
+      <p:sp>
+        <p:nvSpPr>
+          <p:cNvPr id="2" name="タイトル 1">
+            <a:extLst>
+              <a:ext uri="{FF2B5EF4-FFF2-40B4-BE49-F238E27FC236}">
+                <a16:creationId xmlns:a16="http://schemas.microsoft.com/office/drawing/2014/main" id="{0CDC3CC3-6BBD-E82A-3179-C4DC1EAC8CAD}"/>
+              </a:ext>
+            </a:extLst>
+          </p:cNvPr>
+          <p:cNvSpPr>
+            <a:spLocks noGrp="1"/>
+          </p:cNvSpPr>
+          <p:nvPr>
+            <p:ph type="title"/>
+          </p:nvPr>
+        </p:nvSpPr>
+        <p:spPr/>
+        <p:txBody>
+          <a:bodyPr/>
+          <a:lstStyle/>
+          <a:p>
+            <a:r>
+              <a:rPr kumimoji="1" lang="ja-JP" altLang="en-US" dirty="0"/>
+              <a:t>　　シリアル通信をしてみよう</a:t>
+            </a:r>
+          </a:p>
+        </p:txBody>
+      </p:sp>
+      <p:sp>
+        <p:nvSpPr>
+          <p:cNvPr id="3" name="コンテンツ プレースホルダー 2">
+            <a:extLst>
+              <a:ext uri="{FF2B5EF4-FFF2-40B4-BE49-F238E27FC236}">
+                <a16:creationId xmlns:a16="http://schemas.microsoft.com/office/drawing/2014/main" id="{B55AE914-8BAB-3A50-39D0-E7260D428EE8}"/>
+              </a:ext>
+            </a:extLst>
+          </p:cNvPr>
+          <p:cNvSpPr>
+            <a:spLocks noGrp="1"/>
+          </p:cNvSpPr>
+          <p:nvPr>
+            <p:ph idx="1"/>
+          </p:nvPr>
+        </p:nvSpPr>
+        <p:spPr>
+          <a:xfrm>
+            <a:off x="427383" y="1487228"/>
+            <a:ext cx="10515600" cy="2435618"/>
+          </a:xfrm>
+        </p:spPr>
+        <p:txBody>
+          <a:bodyPr>
+            <a:normAutofit/>
+          </a:bodyPr>
+          <a:lstStyle/>
+          <a:p>
+            <a:pPr marL="0" indent="0">
+              <a:buNone/>
+            </a:pPr>
+            <a:r>
+              <a:rPr lang="ja-JP" altLang="en-US" sz="2400" dirty="0"/>
+              <a:t>・ヒント</a:t>
+            </a:r>
+            <a:endParaRPr lang="en-US" altLang="ja-JP" sz="2400" dirty="0"/>
+          </a:p>
+          <a:p>
+            <a:pPr marL="0" indent="0">
+              <a:buNone/>
+            </a:pPr>
+            <a:r>
+              <a:rPr kumimoji="1" lang="ja-JP" altLang="en-US" sz="2400" dirty="0"/>
+              <a:t>　シリアル通信でパソコン側に何かを表示するときは、</a:t>
+            </a:r>
+            <a:r>
+              <a:rPr kumimoji="1" lang="en-US" altLang="ja-JP" sz="2400" dirty="0" err="1"/>
+              <a:t>Serial.println</a:t>
+            </a:r>
+            <a:r>
+              <a:rPr kumimoji="1" lang="en-US" altLang="ja-JP" sz="2400" dirty="0"/>
+              <a:t>(</a:t>
+            </a:r>
+            <a:r>
+              <a:rPr kumimoji="1" lang="ja-JP" altLang="en-US" sz="2400" dirty="0"/>
+              <a:t>表示内容</a:t>
+            </a:r>
+            <a:r>
+              <a:rPr kumimoji="1" lang="en-US" altLang="ja-JP" sz="2400" dirty="0"/>
+              <a:t>)</a:t>
+            </a:r>
+            <a:r>
+              <a:rPr kumimoji="1" lang="ja-JP" altLang="en-US" sz="2400" dirty="0"/>
+              <a:t>とすれば良い</a:t>
+            </a:r>
+            <a:endParaRPr kumimoji="1" lang="en-US" altLang="ja-JP" sz="2400" dirty="0"/>
+          </a:p>
+          <a:p>
+            <a:pPr marL="0" indent="0">
+              <a:buNone/>
+            </a:pPr>
+            <a:r>
+              <a:rPr lang="ja-JP" altLang="en-US" sz="2400" dirty="0"/>
+              <a:t>　逆にパソコンから文字が送られてきた際は、</a:t>
+            </a:r>
+            <a:r>
+              <a:rPr lang="en-US" altLang="ja-JP" sz="2400" dirty="0" err="1"/>
+              <a:t>Serial.Read</a:t>
+            </a:r>
+            <a:r>
+              <a:rPr lang="en-US" altLang="ja-JP" sz="2400" dirty="0"/>
+              <a:t>()</a:t>
+            </a:r>
+            <a:r>
+              <a:rPr lang="ja-JP" altLang="en-US" sz="2400" dirty="0"/>
+              <a:t>で受け取れるが、何も送られてきていない時に実行するとエラーとなるので、送られてきた時だけ</a:t>
+            </a:r>
+            <a:r>
+              <a:rPr lang="en-US" altLang="ja-JP" sz="2400" dirty="0"/>
+              <a:t>1</a:t>
+            </a:r>
+            <a:r>
+              <a:rPr lang="ja-JP" altLang="en-US" sz="2400" dirty="0"/>
+              <a:t>を、それ以外の時は</a:t>
+            </a:r>
+            <a:r>
+              <a:rPr lang="en-US" altLang="ja-JP" sz="2400" dirty="0"/>
+              <a:t>0</a:t>
+            </a:r>
+            <a:r>
+              <a:rPr lang="ja-JP" altLang="en-US" sz="2400" dirty="0"/>
+              <a:t>を返す</a:t>
+            </a:r>
+            <a:r>
+              <a:rPr lang="en-US" altLang="ja-JP" dirty="0" err="1"/>
+              <a:t>Serial.available</a:t>
+            </a:r>
+            <a:r>
+              <a:rPr lang="en-US" altLang="ja-JP" sz="2400" dirty="0"/>
+              <a:t>()</a:t>
+            </a:r>
+            <a:r>
+              <a:rPr lang="ja-JP" altLang="en-US" sz="2400" dirty="0"/>
+              <a:t>を使って、</a:t>
+            </a:r>
+            <a:r>
+              <a:rPr lang="en-US" altLang="ja-JP" sz="2400" dirty="0"/>
+              <a:t>if</a:t>
+            </a:r>
+            <a:r>
+              <a:rPr lang="ja-JP" altLang="en-US" sz="2400" dirty="0"/>
+              <a:t>文で分岐させるのが良い</a:t>
+            </a:r>
+            <a:endParaRPr lang="en-US" altLang="ja-JP" dirty="0"/>
+          </a:p>
+        </p:txBody>
+      </p:sp>
+    </p:spTree>
+    <p:extLst>
+      <p:ext uri="{BB962C8B-B14F-4D97-AF65-F5344CB8AC3E}">
+        <p14:creationId xmlns:p14="http://schemas.microsoft.com/office/powerpoint/2010/main" val="455077068"/>
       </p:ext>
     </p:extLst>
   </p:cSld>
